--- a/Practical Week Overview.pptx
+++ b/Practical Week Overview.pptx
@@ -14,7 +14,6 @@
     <p:sldId id="260" r:id="rId9"/>
     <p:sldId id="261" r:id="rId10"/>
     <p:sldId id="262" r:id="rId11"/>
-    <p:sldId id="263" r:id="rId12"/>
   </p:sldIdLst>
   <p:sldSz cx="9144000" cy="5143500"/>
   <p:notesSz cx="6858000" cy="9144000"/>
@@ -253,7 +252,62 @@
                 <a:uFillTx/>
                 <a:latin typeface="Arial"/>
               </a:rPr>
-              <a:t>Click to edit the title text format</a:t>
+              <a:t>Click </a:t>
+            </a:r>
+            <a:r>
+              <a:rPr b="0" lang="en-US" sz="4200" strike="noStrike" u="none">
+                <a:solidFill>
+                  <a:srgbClr val="000000"/>
+                </a:solidFill>
+                <a:effectLst/>
+                <a:uFillTx/>
+                <a:latin typeface="Arial"/>
+              </a:rPr>
+              <a:t>to edit </a:t>
+            </a:r>
+            <a:r>
+              <a:rPr b="0" lang="en-US" sz="4200" strike="noStrike" u="none">
+                <a:solidFill>
+                  <a:srgbClr val="000000"/>
+                </a:solidFill>
+                <a:effectLst/>
+                <a:uFillTx/>
+                <a:latin typeface="Arial"/>
+              </a:rPr>
+              <a:t>the </a:t>
+            </a:r>
+            <a:r>
+              <a:rPr b="0" lang="en-US" sz="4200" strike="noStrike" u="none">
+                <a:solidFill>
+                  <a:srgbClr val="000000"/>
+                </a:solidFill>
+                <a:effectLst/>
+                <a:uFillTx/>
+                <a:latin typeface="Arial"/>
+              </a:rPr>
+              <a:t>title </a:t>
+            </a:r>
+            <a:r>
+              <a:rPr b="0" lang="en-US" sz="4200" strike="noStrike" u="none">
+                <a:solidFill>
+                  <a:srgbClr val="000000"/>
+                </a:solidFill>
+                <a:effectLst/>
+                <a:uFillTx/>
+                <a:latin typeface="Arial"/>
+              </a:rPr>
+              <a:t>text </a:t>
+            </a:r>
+            <a:r>
+              <a:rPr b="0" lang="en-US" sz="4200" strike="noStrike" u="none">
+                <a:solidFill>
+                  <a:srgbClr val="000000"/>
+                </a:solidFill>
+                <a:effectLst/>
+                <a:uFillTx/>
+                <a:latin typeface="Arial"/>
+              </a:rPr>
+              <a:t>format</a:t>
             </a:r>
             <a:endParaRPr b="0" lang="en-US" sz="4200" strike="noStrike" u="none">
               <a:solidFill>
@@ -323,7 +377,7 @@
                 <a:tab algn="l" pos="0"/>
               </a:tabLst>
             </a:pPr>
-            <a:fld id="{0E76CEFC-A9DF-4009-9F19-EBD631808125}" type="slidenum">
+            <a:fld id="{DA8A7911-64DD-4D8B-BA92-9E35BB59C462}" type="slidenum">
               <a:rPr b="0" lang="de" sz="1000" strike="noStrike" u="none">
                 <a:solidFill>
                   <a:schemeClr val="accent1"/>
@@ -685,7 +739,7 @@
                 <a:tab algn="l" pos="0"/>
               </a:tabLst>
             </a:pPr>
-            <a:fld id="{567B426F-8635-476B-9B2B-15987E752A06}" type="slidenum">
+            <a:fld id="{52D51FC0-0443-4A46-96A2-405D7AF992B8}" type="slidenum">
               <a:rPr b="0" lang="de" sz="1000" strike="noStrike" u="none">
                 <a:solidFill>
                   <a:schemeClr val="accent1"/>
@@ -1047,7 +1101,7 @@
                 <a:tab algn="l" pos="0"/>
               </a:tabLst>
             </a:pPr>
-            <a:fld id="{1A457050-BBAB-4B22-B629-9FCCFF2D6F90}" type="slidenum">
+            <a:fld id="{92411384-1560-4104-92AD-ADDF678F9E53}" type="slidenum">
               <a:rPr b="0" lang="de" sz="1000" strike="noStrike" u="none">
                 <a:solidFill>
                   <a:schemeClr val="accent1"/>
@@ -1630,7 +1684,7 @@
                 <a:tab algn="l" pos="0"/>
               </a:tabLst>
             </a:pPr>
-            <a:fld id="{0EA19413-230F-406D-BCF9-4415D3F178B2}" type="slidenum">
+            <a:fld id="{0B9E83F2-7EED-4ECD-A1E1-73577B5EA9B6}" type="slidenum">
               <a:rPr b="0" lang="de" sz="1000" strike="noStrike" u="none">
                 <a:solidFill>
                   <a:schemeClr val="accent1"/>
@@ -2466,7 +2520,7 @@
                 <a:tab algn="l" pos="0"/>
               </a:tabLst>
             </a:pPr>
-            <a:fld id="{932F7966-5D08-4DB7-9D9C-3AF8F62AD480}" type="slidenum">
+            <a:fld id="{19B4C833-DA01-4F8E-995D-B33C2B5B7B9D}" type="slidenum">
               <a:rPr b="0" lang="de" sz="1000" strike="noStrike" u="none">
                 <a:solidFill>
                   <a:schemeClr val="accent1"/>
@@ -2796,7 +2850,7 @@
                 <a:tab algn="l" pos="0"/>
               </a:tabLst>
             </a:pPr>
-            <a:fld id="{5D2F0BF0-9AC5-406B-8EC1-F196E962B609}" type="slidenum">
+            <a:fld id="{4DE41710-A4A2-4CE2-B6CA-BAC08C69CCB2}" type="slidenum">
               <a:rPr b="0" lang="de" sz="1000" strike="noStrike" u="none">
                 <a:solidFill>
                   <a:schemeClr val="accent1"/>
@@ -3379,7 +3433,7 @@
                 <a:tab algn="l" pos="0"/>
               </a:tabLst>
             </a:pPr>
-            <a:fld id="{C02BDB7F-26D9-43D1-BFDE-D3B910408E53}" type="slidenum">
+            <a:fld id="{19CE543C-B942-4A12-BE3E-41BD1CB8A371}" type="slidenum">
               <a:rPr b="0" lang="de" sz="1000" strike="noStrike" u="none">
                 <a:solidFill>
                   <a:schemeClr val="accent1"/>
@@ -3962,7 +4016,7 @@
                 <a:tab algn="l" pos="0"/>
               </a:tabLst>
             </a:pPr>
-            <a:fld id="{FDEAE947-C134-41EA-90B9-A4A3B7E02C7C}" type="slidenum">
+            <a:fld id="{1517B147-84A5-4EF8-BAA4-CD6C7C91989E}" type="slidenum">
               <a:rPr b="0" lang="de" sz="1000" strike="noStrike" u="none">
                 <a:solidFill>
                   <a:schemeClr val="accent1"/>
@@ -4175,7 +4229,19 @@
                 <a:latin typeface="Raleway"/>
                 <a:ea typeface="Raleway"/>
               </a:rPr>
-              <a:t>xx%</a:t>
+              <a:t>xx</a:t>
+            </a:r>
+            <a:r>
+              <a:rPr b="1" lang="en-US" sz="8000" strike="noStrike" u="none">
+                <a:solidFill>
+                  <a:schemeClr val="lt1"/>
+                </a:solidFill>
+                <a:effectLst/>
+                <a:uFillTx/>
+                <a:latin typeface="Raleway"/>
+                <a:ea typeface="Raleway"/>
+              </a:rPr>
+              <a:t>%</a:t>
             </a:r>
             <a:endParaRPr b="0" lang="en-US" sz="8000" strike="noStrike" u="none">
               <a:solidFill>
@@ -4498,7 +4564,7 @@
                 <a:tab algn="l" pos="0"/>
               </a:tabLst>
             </a:pPr>
-            <a:fld id="{DEDEDFFA-E2BD-4AFB-9E2D-D937720310B9}" type="slidenum">
+            <a:fld id="{2A2FE583-FD44-4795-8AC0-756126064EE7}" type="slidenum">
               <a:rPr b="0" lang="de" sz="1000" strike="noStrike" u="none">
                 <a:solidFill>
                   <a:schemeClr val="lt1"/>
@@ -4777,7 +4843,7 @@
                 <a:tab algn="l" pos="0"/>
               </a:tabLst>
             </a:pPr>
-            <a:fld id="{F80C1BAB-172F-4F61-966E-966F373397A0}" type="slidenum">
+            <a:fld id="{7FC13208-A84A-478E-A32F-FB8D2754A2A2}" type="slidenum">
               <a:rPr b="0" lang="de" sz="1000" strike="noStrike" u="none">
                 <a:solidFill>
                   <a:schemeClr val="lt1"/>
@@ -5056,7 +5122,7 @@
                 <a:tab algn="l" pos="0"/>
               </a:tabLst>
             </a:pPr>
-            <a:fld id="{48303F39-0CC4-44A5-B703-8C39DE67758E}" type="slidenum">
+            <a:fld id="{E7D59241-2A8C-4B8D-AFFC-895AFBA09E08}" type="slidenum">
               <a:rPr b="0" lang="de" sz="1000" strike="noStrike" u="none">
                 <a:solidFill>
                   <a:schemeClr val="lt1"/>
@@ -5255,13 +5321,13 @@
         </p:nvPicPr>
         <p:blipFill>
           <a:blip r:embed="rId1"/>
-          <a:srcRect l="0" t="20463" r="0" b="20470"/>
+          <a:srcRect l="34053" t="20463" r="0" b="20470"/>
           <a:stretch/>
         </p:blipFill>
         <p:spPr>
           <a:xfrm>
-            <a:off x="5206680" y="1998360"/>
-            <a:ext cx="3505680" cy="2975400"/>
+            <a:off x="5715000" y="1998360"/>
+            <a:ext cx="2311560" cy="2975400"/>
           </a:xfrm>
           <a:prstGeom prst="rect">
             <a:avLst/>
@@ -5362,7 +5428,7 @@
         <p:spPr>
           <a:xfrm>
             <a:off x="3890160" y="2759760"/>
-            <a:ext cx="636480" cy="461520"/>
+            <a:ext cx="636480" cy="457560"/>
           </a:xfrm>
           <a:prstGeom prst="rect">
             <a:avLst/>
@@ -5391,19 +5457,7 @@
                 <a:tab algn="l" pos="0"/>
               </a:tabLst>
             </a:pPr>
-            <a:r>
-              <a:rPr b="0" lang="de" sz="1800" strike="noStrike" u="none">
-                <a:solidFill>
-                  <a:schemeClr val="accent1"/>
-                </a:solidFill>
-                <a:effectLst/>
-                <a:uFillTx/>
-                <a:latin typeface="Lato"/>
-                <a:ea typeface="Lato"/>
-              </a:rPr>
-              <a:t>???</a:t>
-            </a:r>
-            <a:endParaRPr b="0" lang="en-US" sz="1800" strike="noStrike" u="none">
+            <a:endParaRPr b="0" lang="en-US" sz="1400" strike="noStrike" u="none">
               <a:solidFill>
                 <a:srgbClr val="000000"/>
               </a:solidFill>
@@ -6922,41 +6976,6 @@
               <a:latin typeface="Arial"/>
             </a:endParaRPr>
           </a:p>
-          <a:p>
-            <a:pPr marL="457200" indent="-311040">
-              <a:lnSpc>
-                <a:spcPct val="115000"/>
-              </a:lnSpc>
-              <a:buClr>
-                <a:srgbClr val="595959"/>
-              </a:buClr>
-              <a:buFont typeface="Lato"/>
-              <a:buChar char="●"/>
-              <a:tabLst>
-                <a:tab algn="l" pos="0"/>
-              </a:tabLst>
-            </a:pPr>
-            <a:r>
-              <a:rPr b="0" lang="de" sz="1300" strike="noStrike" u="none">
-                <a:solidFill>
-                  <a:schemeClr val="accent1"/>
-                </a:solidFill>
-                <a:effectLst/>
-                <a:uFillTx/>
-                <a:latin typeface="Lato"/>
-                <a:ea typeface="Lato"/>
-              </a:rPr>
-              <a:t>???</a:t>
-            </a:r>
-            <a:endParaRPr b="0" lang="en-US" sz="1300" strike="noStrike" u="none">
-              <a:solidFill>
-                <a:srgbClr val="000000"/>
-              </a:solidFill>
-              <a:effectLst/>
-              <a:uFillTx/>
-              <a:latin typeface="Arial"/>
-            </a:endParaRPr>
-          </a:p>
         </p:txBody>
       </p:sp>
     </p:spTree>
@@ -7067,7 +7086,6 @@
                 <a:gridCol w="1809720"/>
                 <a:gridCol w="1809720"/>
                 <a:gridCol w="1809720"/>
-                <a:gridCol w="1809720"/>
               </a:tblGrid>
               <a:tr h="380520">
                 <a:tc>
@@ -7095,70 +7113,6 @@
                           <a:ea typeface="Arial"/>
                         </a:rPr>
                         <a:t>Model</a:t>
-                      </a:r>
-                      <a:endParaRPr b="0" lang="en-US" sz="1400" strike="noStrike" u="none">
-                        <a:solidFill>
-                          <a:srgbClr val="000000"/>
-                        </a:solidFill>
-                        <a:effectLst/>
-                        <a:uFillTx/>
-                        <a:latin typeface="Arial"/>
-                      </a:endParaRPr>
-                    </a:p>
-                  </a:txBody>
-                  <a:tcPr anchor="t" marL="91080" marR="91080">
-                    <a:lnL w="9360">
-                      <a:solidFill>
-                        <a:srgbClr val="9e9e9e"/>
-                      </a:solidFill>
-                      <a:prstDash val="solid"/>
-                    </a:lnL>
-                    <a:lnR w="9360">
-                      <a:solidFill>
-                        <a:srgbClr val="9e9e9e"/>
-                      </a:solidFill>
-                      <a:prstDash val="solid"/>
-                    </a:lnR>
-                    <a:lnT w="9360">
-                      <a:solidFill>
-                        <a:srgbClr val="9e9e9e"/>
-                      </a:solidFill>
-                      <a:prstDash val="solid"/>
-                    </a:lnT>
-                    <a:lnB w="9360">
-                      <a:solidFill>
-                        <a:srgbClr val="9e9e9e"/>
-                      </a:solidFill>
-                      <a:prstDash val="solid"/>
-                    </a:lnB>
-                    <a:noFill/>
-                  </a:tcPr>
-                </a:tc>
-                <a:tc>
-                  <a:txBody>
-                    <a:bodyPr lIns="91080" rIns="91080" tIns="91080" bIns="91080" anchor="t">
-                      <a:noAutofit/>
-                    </a:bodyPr>
-                    <a:p>
-                      <a:pPr>
-                        <a:lnSpc>
-                          <a:spcPct val="100000"/>
-                        </a:lnSpc>
-                        <a:tabLst>
-                          <a:tab algn="l" pos="0"/>
-                        </a:tabLst>
-                      </a:pPr>
-                      <a:r>
-                        <a:rPr b="0" lang="de" sz="1400" strike="noStrike" u="none">
-                          <a:solidFill>
-                            <a:srgbClr val="000000"/>
-                          </a:solidFill>
-                          <a:effectLst/>
-                          <a:uFillTx/>
-                          <a:latin typeface="Arial"/>
-                          <a:ea typeface="Arial"/>
-                        </a:rPr>
-                        <a:t>Logistic Regression</a:t>
                       </a:r>
                       <a:endParaRPr b="0" lang="en-US" sz="1400" strike="noStrike" u="none">
                         <a:solidFill>
@@ -7398,50 +7352,6 @@
                       <a:noAutofit/>
                     </a:bodyPr>
                     <a:p>
-                      <a:endParaRPr b="0" lang="en-US" sz="1800" strike="noStrike" u="none">
-                        <a:solidFill>
-                          <a:srgbClr val="000000"/>
-                        </a:solidFill>
-                        <a:effectLst/>
-                        <a:uFillTx/>
-                        <a:latin typeface="Arial"/>
-                      </a:endParaRPr>
-                    </a:p>
-                  </a:txBody>
-                  <a:tcPr anchor="t" marL="91080" marR="91080">
-                    <a:lnL w="9360">
-                      <a:solidFill>
-                        <a:srgbClr val="9e9e9e"/>
-                      </a:solidFill>
-                      <a:prstDash val="solid"/>
-                    </a:lnL>
-                    <a:lnR w="9360">
-                      <a:solidFill>
-                        <a:srgbClr val="9e9e9e"/>
-                      </a:solidFill>
-                      <a:prstDash val="solid"/>
-                    </a:lnR>
-                    <a:lnT w="9360">
-                      <a:solidFill>
-                        <a:srgbClr val="9e9e9e"/>
-                      </a:solidFill>
-                      <a:prstDash val="solid"/>
-                    </a:lnT>
-                    <a:lnB w="9360">
-                      <a:solidFill>
-                        <a:srgbClr val="9e9e9e"/>
-                      </a:solidFill>
-                      <a:prstDash val="solid"/>
-                    </a:lnB>
-                    <a:noFill/>
-                  </a:tcPr>
-                </a:tc>
-                <a:tc>
-                  <a:txBody>
-                    <a:bodyPr lIns="91080" rIns="91080" tIns="91080" bIns="91080" anchor="t">
-                      <a:noAutofit/>
-                    </a:bodyPr>
-                    <a:p>
                       <a:pPr>
                         <a:lnSpc>
                           <a:spcPct val="100000"/>
@@ -7593,50 +7503,6 @@
                         <a:t>F1</a:t>
                       </a:r>
                       <a:endParaRPr b="0" lang="en-US" sz="1400" strike="noStrike" u="none">
-                        <a:solidFill>
-                          <a:srgbClr val="000000"/>
-                        </a:solidFill>
-                        <a:effectLst/>
-                        <a:uFillTx/>
-                        <a:latin typeface="Arial"/>
-                      </a:endParaRPr>
-                    </a:p>
-                  </a:txBody>
-                  <a:tcPr anchor="t" marL="91080" marR="91080">
-                    <a:lnL w="9360">
-                      <a:solidFill>
-                        <a:srgbClr val="9e9e9e"/>
-                      </a:solidFill>
-                      <a:prstDash val="solid"/>
-                    </a:lnL>
-                    <a:lnR w="9360">
-                      <a:solidFill>
-                        <a:srgbClr val="9e9e9e"/>
-                      </a:solidFill>
-                      <a:prstDash val="solid"/>
-                    </a:lnR>
-                    <a:lnT w="9360">
-                      <a:solidFill>
-                        <a:srgbClr val="9e9e9e"/>
-                      </a:solidFill>
-                      <a:prstDash val="solid"/>
-                    </a:lnT>
-                    <a:lnB w="9360">
-                      <a:solidFill>
-                        <a:srgbClr val="9e9e9e"/>
-                      </a:solidFill>
-                      <a:prstDash val="solid"/>
-                    </a:lnB>
-                    <a:noFill/>
-                  </a:tcPr>
-                </a:tc>
-                <a:tc>
-                  <a:txBody>
-                    <a:bodyPr lIns="91080" rIns="91080" tIns="91080" bIns="91080" anchor="t">
-                      <a:noAutofit/>
-                    </a:bodyPr>
-                    <a:p>
-                      <a:endParaRPr b="0" lang="en-US" sz="1800" strike="noStrike" u="none">
                         <a:solidFill>
                           <a:srgbClr val="000000"/>
                         </a:solidFill>
@@ -7866,50 +7732,6 @@
                       <a:noAutofit/>
                     </a:bodyPr>
                     <a:p>
-                      <a:endParaRPr b="0" lang="en-US" sz="1800" strike="noStrike" u="none">
-                        <a:solidFill>
-                          <a:srgbClr val="000000"/>
-                        </a:solidFill>
-                        <a:effectLst/>
-                        <a:uFillTx/>
-                        <a:latin typeface="Arial"/>
-                      </a:endParaRPr>
-                    </a:p>
-                  </a:txBody>
-                  <a:tcPr anchor="t" marL="91080" marR="91080">
-                    <a:lnL w="9360">
-                      <a:solidFill>
-                        <a:srgbClr val="9e9e9e"/>
-                      </a:solidFill>
-                      <a:prstDash val="solid"/>
-                    </a:lnL>
-                    <a:lnR w="9360">
-                      <a:solidFill>
-                        <a:srgbClr val="9e9e9e"/>
-                      </a:solidFill>
-                      <a:prstDash val="solid"/>
-                    </a:lnR>
-                    <a:lnT w="9360">
-                      <a:solidFill>
-                        <a:srgbClr val="9e9e9e"/>
-                      </a:solidFill>
-                      <a:prstDash val="solid"/>
-                    </a:lnT>
-                    <a:lnB w="9360">
-                      <a:solidFill>
-                        <a:srgbClr val="9e9e9e"/>
-                      </a:solidFill>
-                      <a:prstDash val="solid"/>
-                    </a:lnB>
-                    <a:noFill/>
-                  </a:tcPr>
-                </a:tc>
-                <a:tc>
-                  <a:txBody>
-                    <a:bodyPr lIns="91080" rIns="91080" tIns="91080" bIns="91080" anchor="t">
-                      <a:noAutofit/>
-                    </a:bodyPr>
-                    <a:p>
                       <a:r>
                         <a:rPr b="0" lang="de" sz="1400" strike="noStrike" u="none">
                           <a:solidFill>
@@ -8029,142 +7851,6 @@
           </a:graphicData>
         </a:graphic>
       </p:graphicFrame>
-    </p:spTree>
-  </p:cSld>
-  <mc:AlternateContent>
-    <mc:Choice Requires="p14">
-      <p:transition spd="slow" p14:dur="2000"/>
-    </mc:Choice>
-    <mc:Fallback>
-      <p:transition spd="slow"/>
-    </mc:Fallback>
-  </mc:AlternateContent>
-</p:sld>
-</file>
-
-<file path=ppt/slides/slide8.xml><?xml version="1.0" encoding="utf-8"?>
-<p:sld xmlns:a="http://schemas.openxmlformats.org/drawingml/2006/main" xmlns:p="http://schemas.openxmlformats.org/presentationml/2006/main" xmlns:r="http://schemas.openxmlformats.org/officeDocument/2006/relationships" xmlns:p14="http://schemas.microsoft.com/office/powerpoint/2010/main" xmlns:p15="http://schemas.microsoft.com/office/powerpoint/2012/main" xmlns:mc="http://schemas.openxmlformats.org/markup-compatibility/2006">
-  <p:cSld>
-    <p:spTree>
-      <p:nvGrpSpPr>
-        <p:cNvPr id="1" name=""/>
-        <p:cNvGrpSpPr/>
-        <p:nvPr/>
-      </p:nvGrpSpPr>
-      <p:grpSpPr>
-        <a:xfrm>
-          <a:off x="0" y="0"/>
-          <a:ext cx="0" cy="0"/>
-          <a:chOff x="0" y="0"/>
-          <a:chExt cx="0" cy="0"/>
-        </a:xfrm>
-      </p:grpSpPr>
-      <p:sp>
-        <p:nvSpPr>
-          <p:cNvPr id="86" name="PlaceHolder 1"/>
-          <p:cNvSpPr>
-            <a:spLocks noGrp="1"/>
-          </p:cNvSpPr>
-          <p:nvPr>
-            <p:ph type="title"/>
-          </p:nvPr>
-        </p:nvSpPr>
-        <p:spPr>
-          <a:xfrm>
-            <a:off x="727560" y="554040"/>
-            <a:ext cx="7688520" cy="534960"/>
-          </a:xfrm>
-          <a:prstGeom prst="rect">
-            <a:avLst/>
-          </a:prstGeom>
-          <a:noFill/>
-          <a:ln w="0">
-            <a:noFill/>
-          </a:ln>
-        </p:spPr>
-        <p:txBody>
-          <a:bodyPr lIns="91440" rIns="91440" tIns="91440" bIns="91440" anchor="t">
-            <a:normAutofit fontScale="92500" lnSpcReduction="9999"/>
-          </a:bodyPr>
-          <a:p>
-            <a:pPr indent="0">
-              <a:lnSpc>
-                <a:spcPct val="100000"/>
-              </a:lnSpc>
-              <a:buNone/>
-              <a:tabLst>
-                <a:tab algn="l" pos="0"/>
-              </a:tabLst>
-            </a:pPr>
-            <a:r>
-              <a:rPr b="1" lang="de" sz="2600" strike="noStrike" u="none">
-                <a:solidFill>
-                  <a:schemeClr val="dk2"/>
-                </a:solidFill>
-                <a:effectLst/>
-                <a:uFillTx/>
-                <a:latin typeface="Raleway"/>
-                <a:ea typeface="Raleway"/>
-              </a:rPr>
-              <a:t>Model comparison</a:t>
-            </a:r>
-            <a:endParaRPr b="0" lang="en-US" sz="2600" strike="noStrike" u="none">
-              <a:solidFill>
-                <a:srgbClr val="000000"/>
-              </a:solidFill>
-              <a:effectLst/>
-              <a:uFillTx/>
-              <a:latin typeface="Arial"/>
-            </a:endParaRPr>
-          </a:p>
-        </p:txBody>
-      </p:sp>
-      <p:sp>
-        <p:nvSpPr>
-          <p:cNvPr id="87" name="PlaceHolder 2"/>
-          <p:cNvSpPr>
-            <a:spLocks noGrp="1"/>
-          </p:cNvSpPr>
-          <p:nvPr>
-            <p:ph/>
-          </p:nvPr>
-        </p:nvSpPr>
-        <p:spPr>
-          <a:xfrm>
-            <a:off x="729360" y="2079000"/>
-            <a:ext cx="7688520" cy="2260800"/>
-          </a:xfrm>
-          <a:prstGeom prst="rect">
-            <a:avLst/>
-          </a:prstGeom>
-          <a:noFill/>
-          <a:ln w="0">
-            <a:noFill/>
-          </a:ln>
-        </p:spPr>
-        <p:txBody>
-          <a:bodyPr lIns="91440" rIns="91440" tIns="91440" bIns="91440" anchor="t">
-            <a:normAutofit/>
-          </a:bodyPr>
-          <a:p>
-            <a:pPr indent="0">
-              <a:spcBef>
-                <a:spcPts val="1417"/>
-              </a:spcBef>
-              <a:buNone/>
-            </a:pPr>
-            <a:endParaRPr b="0" lang="en-US" sz="1300" strike="noStrike" u="none">
-              <a:solidFill>
-                <a:schemeClr val="accent1"/>
-              </a:solidFill>
-              <a:effectLst/>
-              <a:uFillTx/>
-              <a:latin typeface="Lato"/>
-              <a:ea typeface="Lato"/>
-            </a:endParaRPr>
-          </a:p>
-        </p:txBody>
-      </p:sp>
     </p:spTree>
   </p:cSld>
   <mc:AlternateContent>
